--- a/scripts/Manual_Codificacion_PPRA.pptx
+++ b/scripts/Manual_Codificacion_PPRA.pptx
@@ -392,7 +392,7 @@
           <a:p>
             <a:fld id="{A9DF37BE-63F7-D04E-AEC4-DC43A32AA23E}" type="datetimeFigureOut">
               <a:rPr lang="en-PE" smtClean="0"/>
-              <a:t>23/03/26</a:t>
+              <a:t>26/03/26</a:t>
             </a:fld>
             <a:endParaRPr lang="en-PE"/>
           </a:p>
@@ -569,7 +569,7 @@
           <a:p>
             <a:fld id="{EE8340E0-AD77-4043-A3C3-5BEDD4FD6B77}" type="datetimeFigureOut">
               <a:rPr lang="es-PE" smtClean="0"/>
-              <a:t>23/03/26</a:t>
+              <a:t>26/03/26</a:t>
             </a:fld>
             <a:endParaRPr lang="es-PE"/>
           </a:p>
@@ -1369,7 +1369,7 @@
                 </a:buClr>
                 <a:buSzPts val="1800"/>
               </a:pPr>
-              <a:t>23/03/26</a:t>
+              <a:t>26/03/26</a:t>
             </a:fld>
             <a:endParaRPr lang="en-PE" dirty="0"/>
           </a:p>
@@ -9932,7 +9932,7 @@
           <a:p>
             <a:fld id="{744CB4CB-0240-FB4C-81F1-218533927016}" type="datetimeFigureOut">
               <a:rPr lang="es-PE" smtClean="0"/>
-              <a:t>23/03/26</a:t>
+              <a:t>26/03/26</a:t>
             </a:fld>
             <a:endParaRPr lang="es-PE"/>
           </a:p>
@@ -18004,7 +18004,7 @@
           <a:p>
             <a:fld id="{75C70C58-02E6-BE4A-9320-917330A400ED}" type="datetimeFigureOut">
               <a:rPr lang="es-PE" smtClean="0"/>
-              <a:t>23/03/26</a:t>
+              <a:t>26/03/26</a:t>
             </a:fld>
             <a:endParaRPr lang="es-PE"/>
           </a:p>
@@ -19327,9 +19327,30 @@
           <a:lstStyle/>
           <a:p>
             <a:r>
-              <a:t>Manual de Codificación
-Plantilla PPRA</a:t>
+              <a:rPr dirty="0"/>
+              <a:t>Manual de </a:t>
             </a:r>
+            <a:r>
+              <a:rPr dirty="0" err="1"/>
+              <a:t>Codificación</a:t>
+            </a:r>
+            <a:r>
+              <a:rPr lang="en-US" dirty="0"/>
+              <a:t> de </a:t>
+            </a:r>
+            <a:r>
+              <a:rPr lang="en-US" dirty="0" err="1"/>
+              <a:t>Preguntas</a:t>
+            </a:r>
+            <a:r>
+              <a:rPr lang="en-US" dirty="0"/>
+              <a:t> </a:t>
+            </a:r>
+            <a:r>
+              <a:rPr lang="en-US" dirty="0" err="1"/>
+              <a:t>Abiertas</a:t>
+            </a:r>
+            <a:endParaRPr dirty="0"/>
           </a:p>
         </p:txBody>
       </p:sp>
@@ -19354,8 +19375,10 @@
           <a:lstStyle/>
           <a:p>
             <a:r>
-              <a:t>ACNUR / Pulso</a:t>
+              <a:rPr lang="en-US" dirty="0"/>
+              <a:t>Gonzalo Almendariz</a:t>
             </a:r>
+            <a:endParaRPr dirty="0"/>
           </a:p>
         </p:txBody>
       </p:sp>
@@ -19380,7 +19403,16 @@
           <a:lstStyle/>
           <a:p>
             <a:r>
-              <a:t>23 de March de 2026</a:t>
+              <a:rPr dirty="0"/>
+              <a:t>Mar</a:t>
+            </a:r>
+            <a:r>
+              <a:rPr lang="es-PE" dirty="0"/>
+              <a:t>zo</a:t>
+            </a:r>
+            <a:r>
+              <a:rPr dirty="0"/>
+              <a:t> de 2026</a:t>
             </a:r>
           </a:p>
         </p:txBody>
@@ -27470,42 +27502,12 @@
           <a:lstStyle/>
           <a:p>
             <a:r>
-              <a:t>Contenido del manual</a:t>
+              <a:rPr dirty="0" err="1"/>
+              <a:t>Contenido</a:t>
             </a:r>
-          </a:p>
-        </p:txBody>
-      </p:sp>
-      <p:sp>
-        <p:nvSpPr>
-          <p:cNvPr id="3" name="Google Shape;66;p47"/>
-          <p:cNvSpPr>
-            <a:spLocks noGrp="1"/>
-          </p:cNvSpPr>
-          <p:nvPr>
-            <p:ph/>
-          </p:nvPr>
-        </p:nvSpPr>
-        <p:spPr>
-          <a:xfrm>
-            <a:off x="10088216" y="158826"/>
-            <a:ext cx="1927827" cy="846037"/>
-          </a:xfrm>
-        </p:spPr>
-        <p:txBody>
-          <a:bodyPr/>
-          <a:lstStyle/>
-          <a:p>
             <a:r>
-              <a:t>Sección 1: Configuración FAMILIAS y construcción de plantilla
-  - Elaborar plantilla FAMILIAS
-  - Definir relaciones padre-hijo y campos de familia
-  - Adoptar familias en R para construir plantilla de codificación
-Sección 2: Guía para Codificadores (Excel)
-  - Estructura de la plantilla de codificación
-  - Cómo codificar cada tipo de variable
-Sección 3: Aplicación técnica en R
-  - Aplicar codificación a datos e instrumento
-  - Troubleshooting y cierre</a:t>
+              <a:rPr dirty="0"/>
+              <a:t> del manual</a:t>
             </a:r>
           </a:p>
         </p:txBody>
@@ -40502,9 +40504,9 @@
         <p:grpSpPr>
           <a:xfrm>
             <a:off x="1860875" y="1162878"/>
-            <a:ext cx="8294659" cy="5068958"/>
+            <a:ext cx="8294658" cy="5068958"/>
             <a:chOff x="1860875" y="1162878"/>
-            <a:chExt cx="8294659" cy="5068958"/>
+            <a:chExt cx="8294658" cy="5068958"/>
           </a:xfrm>
         </p:grpSpPr>
         <p:sp>
@@ -42156,14 +42158,14 @@
         </p:sp>
         <p:sp>
           <p:nvSpPr>
-            <p:cNvPr id="41" name="pl40"/>
-            <p:cNvSpPr/>
-            <p:nvPr/>
-          </p:nvSpPr>
-          <p:spPr>
-            <a:xfrm>
-              <a:off x="5703598" y="4572976"/>
-              <a:ext cx="1827638" cy="23042"/>
+            <p:cNvPr id="43" name="pl42"/>
+            <p:cNvSpPr/>
+            <p:nvPr/>
+          </p:nvSpPr>
+          <p:spPr>
+            <a:xfrm>
+              <a:off x="4789779" y="4987743"/>
+              <a:ext cx="0" cy="368681"/>
             </a:xfrm>
             <a:custGeom>
               <a:avLst/>
@@ -42172,12 +42174,12 @@
               <a:cxnLst/>
               <a:rect l="0" t="0" r="0" b="0"/>
               <a:pathLst>
-                <a:path w="1827638" h="23042">
+                <a:path h="368681">
                   <a:moveTo>
-                    <a:pt x="0" y="23042"/>
+                    <a:pt x="0" y="0"/>
                   </a:moveTo>
                   <a:lnTo>
-                    <a:pt x="1827638" y="0"/>
+                    <a:pt x="0" y="368681"/>
                   </a:lnTo>
                 </a:path>
               </a:pathLst>
@@ -42202,14 +42204,14 @@
         </p:sp>
         <p:sp>
           <p:nvSpPr>
-            <p:cNvPr id="42" name="pg41"/>
-            <p:cNvSpPr/>
-            <p:nvPr/>
-          </p:nvSpPr>
-          <p:spPr>
-            <a:xfrm>
-              <a:off x="7484134" y="4546568"/>
-              <a:ext cx="47102" cy="53995"/>
+            <p:cNvPr id="44" name="pg43"/>
+            <p:cNvSpPr/>
+            <p:nvPr/>
+          </p:nvSpPr>
+          <p:spPr>
+            <a:xfrm>
+              <a:off x="4762779" y="5309660"/>
+              <a:ext cx="53999" cy="46765"/>
             </a:xfrm>
             <a:custGeom>
               <a:avLst/>
@@ -42218,15 +42220,15 @@
               <a:cxnLst/>
               <a:rect l="0" t="0" r="0" b="0"/>
               <a:pathLst>
-                <a:path w="47102" h="53995">
+                <a:path w="53999" h="46765">
                   <a:moveTo>
-                    <a:pt x="680" y="53995"/>
+                    <a:pt x="0" y="0"/>
                   </a:moveTo>
                   <a:lnTo>
-                    <a:pt x="47102" y="26408"/>
-                  </a:lnTo>
-                  <a:lnTo>
-                    <a:pt x="0" y="0"/>
+                    <a:pt x="26999" y="46765"/>
+                  </a:lnTo>
+                  <a:lnTo>
+                    <a:pt x="53999" y="0"/>
                   </a:lnTo>
                   <a:close/>
                 </a:path>
@@ -42257,13 +42259,13 @@
         </p:sp>
         <p:sp>
           <p:nvSpPr>
-            <p:cNvPr id="43" name="pl42"/>
-            <p:cNvSpPr/>
-            <p:nvPr/>
-          </p:nvSpPr>
-          <p:spPr>
-            <a:xfrm>
-              <a:off x="4789779" y="4987743"/>
+            <p:cNvPr id="45" name="pl44"/>
+            <p:cNvSpPr/>
+            <p:nvPr/>
+          </p:nvSpPr>
+          <p:spPr>
+            <a:xfrm>
+              <a:off x="7531236" y="4987743"/>
               <a:ext cx="0" cy="368681"/>
             </a:xfrm>
             <a:custGeom>
@@ -42303,13 +42305,13 @@
         </p:sp>
         <p:sp>
           <p:nvSpPr>
-            <p:cNvPr id="44" name="pg43"/>
-            <p:cNvSpPr/>
-            <p:nvPr/>
-          </p:nvSpPr>
-          <p:spPr>
-            <a:xfrm>
-              <a:off x="4762779" y="5309660"/>
+            <p:cNvPr id="46" name="pg45"/>
+            <p:cNvSpPr/>
+            <p:nvPr/>
+          </p:nvSpPr>
+          <p:spPr>
+            <a:xfrm>
+              <a:off x="7504236" y="5309660"/>
               <a:ext cx="53999" cy="46765"/>
             </a:xfrm>
             <a:custGeom>
@@ -42358,107 +42360,6 @@
         </p:sp>
         <p:sp>
           <p:nvSpPr>
-            <p:cNvPr id="45" name="pl44"/>
-            <p:cNvSpPr/>
-            <p:nvPr/>
-          </p:nvSpPr>
-          <p:spPr>
-            <a:xfrm>
-              <a:off x="7531236" y="4987743"/>
-              <a:ext cx="0" cy="368681"/>
-            </a:xfrm>
-            <a:custGeom>
-              <a:avLst/>
-              <a:gdLst/>
-              <a:ahLst/>
-              <a:cxnLst/>
-              <a:rect l="0" t="0" r="0" b="0"/>
-              <a:pathLst>
-                <a:path h="368681">
-                  <a:moveTo>
-                    <a:pt x="0" y="0"/>
-                  </a:moveTo>
-                  <a:lnTo>
-                    <a:pt x="0" y="368681"/>
-                  </a:lnTo>
-                </a:path>
-              </a:pathLst>
-            </a:custGeom>
-            <a:ln w="16260" cap="flat">
-              <a:solidFill>
-                <a:srgbClr val="555555">
-                  <a:alpha val="100000"/>
-                </a:srgbClr>
-              </a:solidFill>
-              <a:prstDash val="solid"/>
-              <a:round/>
-            </a:ln>
-          </p:spPr>
-          <p:txBody>
-            <a:bodyPr/>
-            <a:lstStyle/>
-            <a:p>
-              <a:endParaRPr/>
-            </a:p>
-          </p:txBody>
-        </p:sp>
-        <p:sp>
-          <p:nvSpPr>
-            <p:cNvPr id="46" name="pg45"/>
-            <p:cNvSpPr/>
-            <p:nvPr/>
-          </p:nvSpPr>
-          <p:spPr>
-            <a:xfrm>
-              <a:off x="7504236" y="5309660"/>
-              <a:ext cx="53999" cy="46765"/>
-            </a:xfrm>
-            <a:custGeom>
-              <a:avLst/>
-              <a:gdLst/>
-              <a:ahLst/>
-              <a:cxnLst/>
-              <a:rect l="0" t="0" r="0" b="0"/>
-              <a:pathLst>
-                <a:path w="53999" h="46765">
-                  <a:moveTo>
-                    <a:pt x="0" y="0"/>
-                  </a:moveTo>
-                  <a:lnTo>
-                    <a:pt x="26999" y="46765"/>
-                  </a:lnTo>
-                  <a:lnTo>
-                    <a:pt x="53999" y="0"/>
-                  </a:lnTo>
-                  <a:close/>
-                </a:path>
-              </a:pathLst>
-            </a:custGeom>
-            <a:solidFill>
-              <a:srgbClr val="555555">
-                <a:alpha val="100000"/>
-              </a:srgbClr>
-            </a:solidFill>
-            <a:ln w="16260" cap="flat">
-              <a:solidFill>
-                <a:srgbClr val="555555">
-                  <a:alpha val="100000"/>
-                </a:srgbClr>
-              </a:solidFill>
-              <a:prstDash val="solid"/>
-              <a:round/>
-            </a:ln>
-          </p:spPr>
-          <p:txBody>
-            <a:bodyPr/>
-            <a:lstStyle/>
-            <a:p>
-              <a:endParaRPr/>
-            </a:p>
-          </p:txBody>
-        </p:sp>
-        <p:sp>
-          <p:nvSpPr>
             <p:cNvPr id="47" name="rc46"/>
             <p:cNvSpPr/>
             <p:nvPr/>
@@ -42916,8 +42817,8 @@
           </p:nvSpPr>
           <p:spPr>
             <a:xfrm>
-              <a:off x="9009307" y="3175248"/>
-              <a:ext cx="455449" cy="74500"/>
+              <a:off x="9009307" y="3175247"/>
+              <a:ext cx="455449" cy="104853"/>
             </a:xfrm>
             <a:prstGeom prst="rect">
               <a:avLst/>
@@ -42940,7 +42841,7 @@
                 </a:spcAft>
               </a:pPr>
               <a:r>
-                <a:rPr sz="796" i="1">
+                <a:rPr sz="796" i="1" dirty="0">
                   <a:solidFill>
                     <a:srgbClr val="BF8F00">
                       <a:alpha val="100000"/>
@@ -42949,7 +42850,7 @@
                   <a:latin typeface="Helvetica"/>
                   <a:cs typeface="Helvetica"/>
                 </a:rPr>
-                <a:t>Tecnico R</a:t>
+                <a:t>R</a:t>
               </a:r>
             </a:p>
           </p:txBody>
@@ -43394,8 +43295,8 @@
           </p:nvSpPr>
           <p:spPr>
             <a:xfrm>
-              <a:off x="9009307" y="4742146"/>
-              <a:ext cx="455449" cy="74500"/>
+              <a:off x="9009307" y="4742145"/>
+              <a:ext cx="455449" cy="133279"/>
             </a:xfrm>
             <a:prstGeom prst="rect">
               <a:avLst/>
@@ -43418,7 +43319,7 @@
                 </a:spcAft>
               </a:pPr>
               <a:r>
-                <a:rPr sz="796" i="1">
+                <a:rPr sz="796" i="1" dirty="0">
                   <a:solidFill>
                     <a:srgbClr val="BF8F00">
                       <a:alpha val="100000"/>
@@ -43427,12 +43328,54 @@
                   <a:latin typeface="Helvetica"/>
                   <a:cs typeface="Helvetica"/>
                 </a:rPr>
-                <a:t>Tecnico R</a:t>
+                <a:t>R</a:t>
               </a:r>
             </a:p>
           </p:txBody>
         </p:sp>
       </p:grpSp>
+      <p:cxnSp>
+        <p:nvCxnSpPr>
+          <p:cNvPr id="60" name="Straight Arrow Connector 59">
+            <a:extLst>
+              <a:ext uri="{FF2B5EF4-FFF2-40B4-BE49-F238E27FC236}">
+                <a16:creationId xmlns:a16="http://schemas.microsoft.com/office/drawing/2014/main" id="{C055FC2B-D9D0-1231-E5BD-37AEBDF97CE9}"/>
+              </a:ext>
+            </a:extLst>
+          </p:cNvPr>
+          <p:cNvCxnSpPr>
+            <a:stCxn id="29" idx="2"/>
+            <a:endCxn id="38" idx="0"/>
+          </p:cNvCxnSpPr>
+          <p:nvPr/>
+        </p:nvCxnSpPr>
+        <p:spPr>
+          <a:xfrm>
+            <a:off x="5703598" y="4204294"/>
+            <a:ext cx="1827638" cy="368682"/>
+          </a:xfrm>
+          <a:prstGeom prst="straightConnector1">
+            <a:avLst/>
+          </a:prstGeom>
+          <a:ln>
+            <a:tailEnd type="triangle"/>
+          </a:ln>
+        </p:spPr>
+        <p:style>
+          <a:lnRef idx="1">
+            <a:schemeClr val="dk1"/>
+          </a:lnRef>
+          <a:fillRef idx="0">
+            <a:schemeClr val="dk1"/>
+          </a:fillRef>
+          <a:effectRef idx="0">
+            <a:schemeClr val="dk1"/>
+          </a:effectRef>
+          <a:fontRef idx="minor">
+            <a:schemeClr val="tx1"/>
+          </a:fontRef>
+        </p:style>
+      </p:cxnSp>
     </p:spTree>
   </p:cSld>
   <p:clrMapOvr>
@@ -51806,7 +51749,7 @@
               <a:buNone/>
             </a:pPr>
             <a:r>
-              <a:rPr sz="1400" b="1" i="0" u="none" strike="noStrike" cap="none">
+              <a:rPr sz="1400" b="1" i="0" u="none" strike="noStrike" cap="none" dirty="0">
                 <a:solidFill>
                   <a:srgbClr val="333333">
                     <a:alpha val="100000"/>
@@ -51816,24 +51759,10 @@
                 <a:cs typeface="Calibri"/>
                 <a:sym typeface="Calibri"/>
               </a:rPr>
-              <a:t>Etapa A: Elaborar y completar FAMILIAS</a:t>
+              <a:t>Etapa A: </a:t>
             </a:r>
-          </a:p>
-          <a:p>
-            <a:pPr marL="0" marR="0" algn="l">
-              <a:lnSpc>
-                <a:spcPct val="100000"/>
-              </a:lnSpc>
-              <a:spcBef>
-                <a:spcPts val="0"/>
-              </a:spcBef>
-              <a:spcAft>
-                <a:spcPts val="0"/>
-              </a:spcAft>
-              <a:buNone/>
-            </a:pPr>
             <a:r>
-              <a:rPr sz="1400" b="0" i="0" u="none" strike="noStrike" cap="none">
+              <a:rPr sz="1400" b="1" i="0" u="none" strike="noStrike" cap="none" dirty="0" err="1">
                 <a:solidFill>
                   <a:srgbClr val="333333">
                     <a:alpha val="100000"/>
@@ -51843,24 +51772,10 @@
                 <a:cs typeface="Calibri"/>
                 <a:sym typeface="Calibri"/>
               </a:rPr>
-              <a:t>Etapa B: Adoptar FAMILIAS en R y construir plantilla de codificación</a:t>
+              <a:t>Elaborar</a:t>
             </a:r>
-          </a:p>
-          <a:p>
-            <a:pPr marL="0" marR="0" algn="l">
-              <a:lnSpc>
-                <a:spcPct val="100000"/>
-              </a:lnSpc>
-              <a:spcBef>
-                <a:spcPts val="0"/>
-              </a:spcBef>
-              <a:spcAft>
-                <a:spcPts val="0"/>
-              </a:spcAft>
-              <a:buNone/>
-            </a:pPr>
             <a:r>
-              <a:rPr sz="1400" b="0" i="0" u="none" strike="noStrike" cap="none">
+              <a:rPr sz="1400" b="1" i="0" u="none" strike="noStrike" cap="none" dirty="0">
                 <a:solidFill>
                   <a:srgbClr val="333333">
                     <a:alpha val="100000"/>
@@ -51870,24 +51785,10 @@
                 <a:cs typeface="Calibri"/>
                 <a:sym typeface="Calibri"/>
               </a:rPr>
-              <a:t>Etapa C: Codificador completa *_recod en Excel</a:t>
+              <a:t> y </a:t>
             </a:r>
-          </a:p>
-          <a:p>
-            <a:pPr marL="0" marR="0" algn="l">
-              <a:lnSpc>
-                <a:spcPct val="100000"/>
-              </a:lnSpc>
-              <a:spcBef>
-                <a:spcPts val="0"/>
-              </a:spcBef>
-              <a:spcAft>
-                <a:spcPts val="0"/>
-              </a:spcAft>
-              <a:buNone/>
-            </a:pPr>
             <a:r>
-              <a:rPr sz="1400" b="0" i="0" u="none" strike="noStrike" cap="none">
+              <a:rPr sz="1400" b="1" i="0" u="none" strike="noStrike" cap="none" dirty="0" err="1">
                 <a:solidFill>
                   <a:srgbClr val="333333">
                     <a:alpha val="100000"/>
@@ -51897,24 +51798,10 @@
                 <a:cs typeface="Calibri"/>
                 <a:sym typeface="Calibri"/>
               </a:rPr>
-              <a:t>Etapa D: Aplicar codificación a datos (R)</a:t>
+              <a:t>completar</a:t>
             </a:r>
-          </a:p>
-          <a:p>
-            <a:pPr marL="0" marR="0" algn="l">
-              <a:lnSpc>
-                <a:spcPct val="100000"/>
-              </a:lnSpc>
-              <a:spcBef>
-                <a:spcPts val="0"/>
-              </a:spcBef>
-              <a:spcAft>
-                <a:spcPts val="0"/>
-              </a:spcAft>
-              <a:buNone/>
-            </a:pPr>
             <a:r>
-              <a:rPr sz="1400" b="0" i="0" u="none" strike="noStrike" cap="none">
+              <a:rPr sz="1400" b="1" i="0" u="none" strike="noStrike" cap="none" dirty="0">
                 <a:solidFill>
                   <a:srgbClr val="333333">
                     <a:alpha val="100000"/>
@@ -51924,7 +51811,7 @@
                 <a:cs typeface="Calibri"/>
                 <a:sym typeface="Calibri"/>
               </a:rPr>
-              <a:t>Etapa E: Adaptar instrumento (R)</a:t>
+              <a:t> FAMILIAS</a:t>
             </a:r>
           </a:p>
           <a:p>
@@ -51941,7 +51828,7 @@
               <a:buNone/>
             </a:pPr>
             <a:r>
-              <a:rPr sz="1400" b="0" i="0" u="none" strike="noStrike" cap="none">
+              <a:rPr sz="1400" b="0" i="0" u="none" strike="noStrike" cap="none" dirty="0">
                 <a:solidFill>
                   <a:srgbClr val="333333">
                     <a:alpha val="100000"/>
@@ -51951,8 +51838,552 @@
                 <a:cs typeface="Calibri"/>
                 <a:sym typeface="Calibri"/>
               </a:rPr>
-              <a:t>Etapa F: Revisión final y salida para análisis</a:t>
+              <a:t>Etapa B: </a:t>
             </a:r>
+            <a:r>
+              <a:rPr sz="1400" b="0" i="0" u="none" strike="noStrike" cap="none" dirty="0" err="1">
+                <a:solidFill>
+                  <a:srgbClr val="333333">
+                    <a:alpha val="100000"/>
+                  </a:srgbClr>
+                </a:solidFill>
+                <a:latin typeface="Calibri"/>
+                <a:cs typeface="Calibri"/>
+                <a:sym typeface="Calibri"/>
+              </a:rPr>
+              <a:t>Adoptar</a:t>
+            </a:r>
+            <a:r>
+              <a:rPr sz="1400" b="0" i="0" u="none" strike="noStrike" cap="none" dirty="0">
+                <a:solidFill>
+                  <a:srgbClr val="333333">
+                    <a:alpha val="100000"/>
+                  </a:srgbClr>
+                </a:solidFill>
+                <a:latin typeface="Calibri"/>
+                <a:cs typeface="Calibri"/>
+                <a:sym typeface="Calibri"/>
+              </a:rPr>
+              <a:t> FAMILIAS </a:t>
+            </a:r>
+            <a:r>
+              <a:rPr sz="1400" b="0" i="0" u="none" strike="noStrike" cap="none" dirty="0" err="1">
+                <a:solidFill>
+                  <a:srgbClr val="333333">
+                    <a:alpha val="100000"/>
+                  </a:srgbClr>
+                </a:solidFill>
+                <a:latin typeface="Calibri"/>
+                <a:cs typeface="Calibri"/>
+                <a:sym typeface="Calibri"/>
+              </a:rPr>
+              <a:t>en</a:t>
+            </a:r>
+            <a:r>
+              <a:rPr sz="1400" b="0" i="0" u="none" strike="noStrike" cap="none" dirty="0">
+                <a:solidFill>
+                  <a:srgbClr val="333333">
+                    <a:alpha val="100000"/>
+                  </a:srgbClr>
+                </a:solidFill>
+                <a:latin typeface="Calibri"/>
+                <a:cs typeface="Calibri"/>
+                <a:sym typeface="Calibri"/>
+              </a:rPr>
+              <a:t> R y </a:t>
+            </a:r>
+            <a:r>
+              <a:rPr sz="1400" b="0" i="0" u="none" strike="noStrike" cap="none" dirty="0" err="1">
+                <a:solidFill>
+                  <a:srgbClr val="333333">
+                    <a:alpha val="100000"/>
+                  </a:srgbClr>
+                </a:solidFill>
+                <a:latin typeface="Calibri"/>
+                <a:cs typeface="Calibri"/>
+                <a:sym typeface="Calibri"/>
+              </a:rPr>
+              <a:t>construir</a:t>
+            </a:r>
+            <a:r>
+              <a:rPr sz="1400" b="0" i="0" u="none" strike="noStrike" cap="none" dirty="0">
+                <a:solidFill>
+                  <a:srgbClr val="333333">
+                    <a:alpha val="100000"/>
+                  </a:srgbClr>
+                </a:solidFill>
+                <a:latin typeface="Calibri"/>
+                <a:cs typeface="Calibri"/>
+                <a:sym typeface="Calibri"/>
+              </a:rPr>
+              <a:t> </a:t>
+            </a:r>
+            <a:r>
+              <a:rPr sz="1400" b="0" i="0" u="none" strike="noStrike" cap="none" dirty="0" err="1">
+                <a:solidFill>
+                  <a:srgbClr val="333333">
+                    <a:alpha val="100000"/>
+                  </a:srgbClr>
+                </a:solidFill>
+                <a:latin typeface="Calibri"/>
+                <a:cs typeface="Calibri"/>
+                <a:sym typeface="Calibri"/>
+              </a:rPr>
+              <a:t>plantilla</a:t>
+            </a:r>
+            <a:r>
+              <a:rPr sz="1400" b="0" i="0" u="none" strike="noStrike" cap="none" dirty="0">
+                <a:solidFill>
+                  <a:srgbClr val="333333">
+                    <a:alpha val="100000"/>
+                  </a:srgbClr>
+                </a:solidFill>
+                <a:latin typeface="Calibri"/>
+                <a:cs typeface="Calibri"/>
+                <a:sym typeface="Calibri"/>
+              </a:rPr>
+              <a:t> de </a:t>
+            </a:r>
+            <a:r>
+              <a:rPr sz="1400" b="0" i="0" u="none" strike="noStrike" cap="none" dirty="0" err="1">
+                <a:solidFill>
+                  <a:srgbClr val="333333">
+                    <a:alpha val="100000"/>
+                  </a:srgbClr>
+                </a:solidFill>
+                <a:latin typeface="Calibri"/>
+                <a:cs typeface="Calibri"/>
+                <a:sym typeface="Calibri"/>
+              </a:rPr>
+              <a:t>codificación</a:t>
+            </a:r>
+            <a:endParaRPr sz="1400" b="0" i="0" u="none" strike="noStrike" cap="none" dirty="0">
+              <a:solidFill>
+                <a:srgbClr val="333333">
+                  <a:alpha val="100000"/>
+                </a:srgbClr>
+              </a:solidFill>
+              <a:latin typeface="Calibri"/>
+              <a:cs typeface="Calibri"/>
+              <a:sym typeface="Calibri"/>
+            </a:endParaRPr>
+          </a:p>
+          <a:p>
+            <a:pPr marL="0" marR="0" algn="l">
+              <a:lnSpc>
+                <a:spcPct val="100000"/>
+              </a:lnSpc>
+              <a:spcBef>
+                <a:spcPts val="0"/>
+              </a:spcBef>
+              <a:spcAft>
+                <a:spcPts val="0"/>
+              </a:spcAft>
+              <a:buNone/>
+            </a:pPr>
+            <a:r>
+              <a:rPr sz="1400" b="0" i="0" u="none" strike="noStrike" cap="none" dirty="0">
+                <a:solidFill>
+                  <a:srgbClr val="333333">
+                    <a:alpha val="100000"/>
+                  </a:srgbClr>
+                </a:solidFill>
+                <a:latin typeface="Calibri"/>
+                <a:cs typeface="Calibri"/>
+                <a:sym typeface="Calibri"/>
+              </a:rPr>
+              <a:t>Etapa C: </a:t>
+            </a:r>
+            <a:r>
+              <a:rPr sz="1400" b="0" i="0" u="none" strike="noStrike" cap="none" dirty="0" err="1">
+                <a:solidFill>
+                  <a:srgbClr val="333333">
+                    <a:alpha val="100000"/>
+                  </a:srgbClr>
+                </a:solidFill>
+                <a:latin typeface="Calibri"/>
+                <a:cs typeface="Calibri"/>
+                <a:sym typeface="Calibri"/>
+              </a:rPr>
+              <a:t>Codificador</a:t>
+            </a:r>
+            <a:r>
+              <a:rPr sz="1400" b="0" i="0" u="none" strike="noStrike" cap="none" dirty="0">
+                <a:solidFill>
+                  <a:srgbClr val="333333">
+                    <a:alpha val="100000"/>
+                  </a:srgbClr>
+                </a:solidFill>
+                <a:latin typeface="Calibri"/>
+                <a:cs typeface="Calibri"/>
+                <a:sym typeface="Calibri"/>
+              </a:rPr>
+              <a:t> </a:t>
+            </a:r>
+            <a:r>
+              <a:rPr sz="1400" b="0" i="0" u="none" strike="noStrike" cap="none" dirty="0" err="1">
+                <a:solidFill>
+                  <a:srgbClr val="333333">
+                    <a:alpha val="100000"/>
+                  </a:srgbClr>
+                </a:solidFill>
+                <a:latin typeface="Calibri"/>
+                <a:cs typeface="Calibri"/>
+                <a:sym typeface="Calibri"/>
+              </a:rPr>
+              <a:t>completa</a:t>
+            </a:r>
+            <a:r>
+              <a:rPr sz="1400" b="0" i="0" u="none" strike="noStrike" cap="none" dirty="0">
+                <a:solidFill>
+                  <a:srgbClr val="333333">
+                    <a:alpha val="100000"/>
+                  </a:srgbClr>
+                </a:solidFill>
+                <a:latin typeface="Calibri"/>
+                <a:cs typeface="Calibri"/>
+                <a:sym typeface="Calibri"/>
+              </a:rPr>
+              <a:t> *_</a:t>
+            </a:r>
+            <a:r>
+              <a:rPr sz="1400" b="0" i="0" u="none" strike="noStrike" cap="none" dirty="0" err="1">
+                <a:solidFill>
+                  <a:srgbClr val="333333">
+                    <a:alpha val="100000"/>
+                  </a:srgbClr>
+                </a:solidFill>
+                <a:latin typeface="Calibri"/>
+                <a:cs typeface="Calibri"/>
+                <a:sym typeface="Calibri"/>
+              </a:rPr>
+              <a:t>recod</a:t>
+            </a:r>
+            <a:r>
+              <a:rPr sz="1400" b="0" i="0" u="none" strike="noStrike" cap="none" dirty="0">
+                <a:solidFill>
+                  <a:srgbClr val="333333">
+                    <a:alpha val="100000"/>
+                  </a:srgbClr>
+                </a:solidFill>
+                <a:latin typeface="Calibri"/>
+                <a:cs typeface="Calibri"/>
+                <a:sym typeface="Calibri"/>
+              </a:rPr>
+              <a:t> </a:t>
+            </a:r>
+            <a:r>
+              <a:rPr sz="1400" b="0" i="0" u="none" strike="noStrike" cap="none" dirty="0" err="1">
+                <a:solidFill>
+                  <a:srgbClr val="333333">
+                    <a:alpha val="100000"/>
+                  </a:srgbClr>
+                </a:solidFill>
+                <a:latin typeface="Calibri"/>
+                <a:cs typeface="Calibri"/>
+                <a:sym typeface="Calibri"/>
+              </a:rPr>
+              <a:t>en</a:t>
+            </a:r>
+            <a:r>
+              <a:rPr sz="1400" b="0" i="0" u="none" strike="noStrike" cap="none" dirty="0">
+                <a:solidFill>
+                  <a:srgbClr val="333333">
+                    <a:alpha val="100000"/>
+                  </a:srgbClr>
+                </a:solidFill>
+                <a:latin typeface="Calibri"/>
+                <a:cs typeface="Calibri"/>
+                <a:sym typeface="Calibri"/>
+              </a:rPr>
+              <a:t> Excel</a:t>
+            </a:r>
+          </a:p>
+          <a:p>
+            <a:pPr marL="0" marR="0" algn="l">
+              <a:lnSpc>
+                <a:spcPct val="100000"/>
+              </a:lnSpc>
+              <a:spcBef>
+                <a:spcPts val="0"/>
+              </a:spcBef>
+              <a:spcAft>
+                <a:spcPts val="0"/>
+              </a:spcAft>
+              <a:buNone/>
+            </a:pPr>
+            <a:r>
+              <a:rPr sz="1400" b="0" i="0" u="none" strike="noStrike" cap="none" dirty="0">
+                <a:solidFill>
+                  <a:srgbClr val="333333">
+                    <a:alpha val="100000"/>
+                  </a:srgbClr>
+                </a:solidFill>
+                <a:latin typeface="Calibri"/>
+                <a:cs typeface="Calibri"/>
+                <a:sym typeface="Calibri"/>
+              </a:rPr>
+              <a:t>Etapa D: </a:t>
+            </a:r>
+            <a:r>
+              <a:rPr sz="1400" b="0" i="0" u="none" strike="noStrike" cap="none" dirty="0" err="1">
+                <a:solidFill>
+                  <a:srgbClr val="333333">
+                    <a:alpha val="100000"/>
+                  </a:srgbClr>
+                </a:solidFill>
+                <a:latin typeface="Calibri"/>
+                <a:cs typeface="Calibri"/>
+                <a:sym typeface="Calibri"/>
+              </a:rPr>
+              <a:t>Aplicar</a:t>
+            </a:r>
+            <a:r>
+              <a:rPr sz="1400" b="0" i="0" u="none" strike="noStrike" cap="none" dirty="0">
+                <a:solidFill>
+                  <a:srgbClr val="333333">
+                    <a:alpha val="100000"/>
+                  </a:srgbClr>
+                </a:solidFill>
+                <a:latin typeface="Calibri"/>
+                <a:cs typeface="Calibri"/>
+                <a:sym typeface="Calibri"/>
+              </a:rPr>
+              <a:t> </a:t>
+            </a:r>
+            <a:r>
+              <a:rPr sz="1400" b="0" i="0" u="none" strike="noStrike" cap="none" dirty="0" err="1">
+                <a:solidFill>
+                  <a:srgbClr val="333333">
+                    <a:alpha val="100000"/>
+                  </a:srgbClr>
+                </a:solidFill>
+                <a:latin typeface="Calibri"/>
+                <a:cs typeface="Calibri"/>
+                <a:sym typeface="Calibri"/>
+              </a:rPr>
+              <a:t>codificación</a:t>
+            </a:r>
+            <a:r>
+              <a:rPr sz="1400" b="0" i="0" u="none" strike="noStrike" cap="none" dirty="0">
+                <a:solidFill>
+                  <a:srgbClr val="333333">
+                    <a:alpha val="100000"/>
+                  </a:srgbClr>
+                </a:solidFill>
+                <a:latin typeface="Calibri"/>
+                <a:cs typeface="Calibri"/>
+                <a:sym typeface="Calibri"/>
+              </a:rPr>
+              <a:t> a </a:t>
+            </a:r>
+            <a:r>
+              <a:rPr sz="1400" b="0" i="0" u="none" strike="noStrike" cap="none" dirty="0" err="1">
+                <a:solidFill>
+                  <a:srgbClr val="333333">
+                    <a:alpha val="100000"/>
+                  </a:srgbClr>
+                </a:solidFill>
+                <a:latin typeface="Calibri"/>
+                <a:cs typeface="Calibri"/>
+                <a:sym typeface="Calibri"/>
+              </a:rPr>
+              <a:t>datos</a:t>
+            </a:r>
+            <a:r>
+              <a:rPr sz="1400" b="0" i="0" u="none" strike="noStrike" cap="none" dirty="0">
+                <a:solidFill>
+                  <a:srgbClr val="333333">
+                    <a:alpha val="100000"/>
+                  </a:srgbClr>
+                </a:solidFill>
+                <a:latin typeface="Calibri"/>
+                <a:cs typeface="Calibri"/>
+                <a:sym typeface="Calibri"/>
+              </a:rPr>
+              <a:t> (R)</a:t>
+            </a:r>
+          </a:p>
+          <a:p>
+            <a:pPr marL="0" marR="0" algn="l">
+              <a:lnSpc>
+                <a:spcPct val="100000"/>
+              </a:lnSpc>
+              <a:spcBef>
+                <a:spcPts val="0"/>
+              </a:spcBef>
+              <a:spcAft>
+                <a:spcPts val="0"/>
+              </a:spcAft>
+              <a:buNone/>
+            </a:pPr>
+            <a:r>
+              <a:rPr sz="1400" b="0" i="0" u="none" strike="noStrike" cap="none" dirty="0">
+                <a:solidFill>
+                  <a:srgbClr val="333333">
+                    <a:alpha val="100000"/>
+                  </a:srgbClr>
+                </a:solidFill>
+                <a:latin typeface="Calibri"/>
+                <a:cs typeface="Calibri"/>
+                <a:sym typeface="Calibri"/>
+              </a:rPr>
+              <a:t>Etapa E: </a:t>
+            </a:r>
+            <a:r>
+              <a:rPr sz="1400" b="0" i="0" u="none" strike="noStrike" cap="none" dirty="0" err="1">
+                <a:solidFill>
+                  <a:srgbClr val="333333">
+                    <a:alpha val="100000"/>
+                  </a:srgbClr>
+                </a:solidFill>
+                <a:latin typeface="Calibri"/>
+                <a:cs typeface="Calibri"/>
+                <a:sym typeface="Calibri"/>
+              </a:rPr>
+              <a:t>Adaptar</a:t>
+            </a:r>
+            <a:r>
+              <a:rPr sz="1400" b="0" i="0" u="none" strike="noStrike" cap="none" dirty="0">
+                <a:solidFill>
+                  <a:srgbClr val="333333">
+                    <a:alpha val="100000"/>
+                  </a:srgbClr>
+                </a:solidFill>
+                <a:latin typeface="Calibri"/>
+                <a:cs typeface="Calibri"/>
+                <a:sym typeface="Calibri"/>
+              </a:rPr>
+              <a:t> </a:t>
+            </a:r>
+            <a:r>
+              <a:rPr sz="1400" b="0" i="0" u="none" strike="noStrike" cap="none" dirty="0" err="1">
+                <a:solidFill>
+                  <a:srgbClr val="333333">
+                    <a:alpha val="100000"/>
+                  </a:srgbClr>
+                </a:solidFill>
+                <a:latin typeface="Calibri"/>
+                <a:cs typeface="Calibri"/>
+                <a:sym typeface="Calibri"/>
+              </a:rPr>
+              <a:t>instrumento</a:t>
+            </a:r>
+            <a:r>
+              <a:rPr sz="1400" b="0" i="0" u="none" strike="noStrike" cap="none" dirty="0">
+                <a:solidFill>
+                  <a:srgbClr val="333333">
+                    <a:alpha val="100000"/>
+                  </a:srgbClr>
+                </a:solidFill>
+                <a:latin typeface="Calibri"/>
+                <a:cs typeface="Calibri"/>
+                <a:sym typeface="Calibri"/>
+              </a:rPr>
+              <a:t> (R)</a:t>
+            </a:r>
+          </a:p>
+          <a:p>
+            <a:pPr marL="0" marR="0" algn="l">
+              <a:lnSpc>
+                <a:spcPct val="100000"/>
+              </a:lnSpc>
+              <a:spcBef>
+                <a:spcPts val="0"/>
+              </a:spcBef>
+              <a:spcAft>
+                <a:spcPts val="0"/>
+              </a:spcAft>
+              <a:buNone/>
+            </a:pPr>
+            <a:r>
+              <a:rPr sz="1400" b="0" i="0" u="none" strike="noStrike" cap="none" dirty="0">
+                <a:solidFill>
+                  <a:srgbClr val="333333">
+                    <a:alpha val="100000"/>
+                  </a:srgbClr>
+                </a:solidFill>
+                <a:latin typeface="Calibri"/>
+                <a:cs typeface="Calibri"/>
+                <a:sym typeface="Calibri"/>
+              </a:rPr>
+              <a:t>Etapa F: </a:t>
+            </a:r>
+            <a:r>
+              <a:rPr sz="1400" b="0" i="0" u="none" strike="noStrike" cap="none" dirty="0" err="1">
+                <a:solidFill>
+                  <a:srgbClr val="333333">
+                    <a:alpha val="100000"/>
+                  </a:srgbClr>
+                </a:solidFill>
+                <a:latin typeface="Calibri"/>
+                <a:cs typeface="Calibri"/>
+                <a:sym typeface="Calibri"/>
+              </a:rPr>
+              <a:t>Revisión</a:t>
+            </a:r>
+            <a:r>
+              <a:rPr sz="1400" b="0" i="0" u="none" strike="noStrike" cap="none" dirty="0">
+                <a:solidFill>
+                  <a:srgbClr val="333333">
+                    <a:alpha val="100000"/>
+                  </a:srgbClr>
+                </a:solidFill>
+                <a:latin typeface="Calibri"/>
+                <a:cs typeface="Calibri"/>
+                <a:sym typeface="Calibri"/>
+              </a:rPr>
+              <a:t> final y </a:t>
+            </a:r>
+            <a:r>
+              <a:rPr sz="1400" b="0" i="0" u="none" strike="noStrike" cap="none" dirty="0" err="1">
+                <a:solidFill>
+                  <a:srgbClr val="333333">
+                    <a:alpha val="100000"/>
+                  </a:srgbClr>
+                </a:solidFill>
+                <a:latin typeface="Calibri"/>
+                <a:cs typeface="Calibri"/>
+                <a:sym typeface="Calibri"/>
+              </a:rPr>
+              <a:t>salida</a:t>
+            </a:r>
+            <a:r>
+              <a:rPr sz="1400" b="0" i="0" u="none" strike="noStrike" cap="none" dirty="0">
+                <a:solidFill>
+                  <a:srgbClr val="333333">
+                    <a:alpha val="100000"/>
+                  </a:srgbClr>
+                </a:solidFill>
+                <a:latin typeface="Calibri"/>
+                <a:cs typeface="Calibri"/>
+                <a:sym typeface="Calibri"/>
+              </a:rPr>
+              <a:t> para </a:t>
+            </a:r>
+            <a:r>
+              <a:rPr sz="1400" b="0" i="0" u="none" strike="noStrike" cap="none" dirty="0" err="1">
+                <a:solidFill>
+                  <a:srgbClr val="333333">
+                    <a:alpha val="100000"/>
+                  </a:srgbClr>
+                </a:solidFill>
+                <a:latin typeface="Calibri"/>
+                <a:cs typeface="Calibri"/>
+                <a:sym typeface="Calibri"/>
+              </a:rPr>
+              <a:t>análisis</a:t>
+            </a:r>
+            <a:endParaRPr sz="1400" b="0" i="0" u="none" strike="noStrike" cap="none" dirty="0">
+              <a:solidFill>
+                <a:srgbClr val="333333">
+                  <a:alpha val="100000"/>
+                </a:srgbClr>
+              </a:solidFill>
+              <a:latin typeface="Calibri"/>
+              <a:cs typeface="Calibri"/>
+              <a:sym typeface="Calibri"/>
+            </a:endParaRPr>
           </a:p>
         </p:txBody>
       </p:sp>
